--- a/db_optimization_demo/ppt/全链路性能瓶颈排查与综合调优.pptx
+++ b/db_optimization_demo/ppt/全链路性能瓶颈排查与综合调优.pptx
@@ -3583,7 +3583,7 @@
                 </a:solidFill>
                 <a:latin typeface="微软雅黑"/>
               </a:rPr>
-              <a:t>模拟企业线上数据库综合故障场景：慢查询 · 索引异常 · 事务死锁 · 锁等待 · 主从延迟</a:t>
+              <a:t>真实 MySQL 8.0 实测：100万订单 | 真实触发死锁/锁等待 | EXPLAIN 调优前后对比</a:t>
             </a:r>
           </a:p>
         </p:txBody>
@@ -3622,7 +3622,7 @@
                 </a:solidFill>
                 <a:latin typeface="微软雅黑"/>
               </a:rPr>
-              <a:t>业务场景：电商订单系统    |    数据库：MySQL 8.0    |    汇报时长：约 10 分钟</a:t>
+              <a:t>业务场景：电商订单系统    |    数据库：MySQL 8.0  |  数据量：100万订单    |    汇报时长：约 10 分钟</a:t>
             </a:r>
           </a:p>
         </p:txBody>
@@ -7491,7 +7491,7 @@
                 </a:solidFill>
                 <a:latin typeface="Consolas"/>
               </a:rPr>
-              <a:t>*** (1) TRANSACTION: 持有 product_id=1 行锁, 等待 product_id=2</a:t>
+              <a:t>*** (1) TRANSACTION 2576: HOLD product_id=2, WAIT product_id=1</a:t>
             </a:r>
           </a:p>
           <a:p>
@@ -7507,7 +7507,7 @@
                 </a:solidFill>
                 <a:latin typeface="Consolas"/>
               </a:rPr>
-              <a:t>*** (1) WAITING FOR THIS LOCK TO BE GRANTED...</a:t>
+              <a:t>*** (1) HOLDS: lock_data=product_id=2  WAITING: lock_data=product_id=1</a:t>
             </a:r>
           </a:p>
           <a:p>
@@ -7523,7 +7523,7 @@
                 </a:solidFill>
                 <a:latin typeface="Consolas"/>
               </a:rPr>
-              <a:t>*** (2) TRANSACTION: 持有 product_id=2 行锁, 等待 product_id=1</a:t>
+              <a:t>*** (2) TRANSACTION 2575: HOLD product_id=1, WAIT product_id=2</a:t>
             </a:r>
           </a:p>
           <a:p>
@@ -7539,7 +7539,7 @@
                 </a:solidFill>
                 <a:latin typeface="Consolas"/>
               </a:rPr>
-              <a:t>*** (2) HOLDS THE LOCK(S)...  WAITING FOR THIS LOCK...</a:t>
+              <a:t>*** (2) HOLDS: lock_data=product_id=1  WAITING: lock_data=product_id=2</a:t>
             </a:r>
           </a:p>
           <a:p>
@@ -7555,7 +7555,7 @@
                 </a:solidFill>
                 <a:latin typeface="Consolas"/>
               </a:rPr>
-              <a:t>*** WE ROLL BACK TRANSACTION (2)   -- 回滚代价较小的一方</a:t>
+              <a:t>*** WE ROLL BACK TRANSACTION (2)   -- MySQL检测到环，2575被回滚</a:t>
             </a:r>
           </a:p>
         </p:txBody>
@@ -10021,7 +10021,7 @@
                 </a:solidFill>
                 <a:latin typeface="Consolas"/>
               </a:rPr>
-              <a:t>SELECT trx_id, trx_started,</a:t>
+              <a:t>SELECT trx_id, trx_state,</a:t>
             </a:r>
           </a:p>
           <a:p>
@@ -10053,7 +10053,7 @@
                 </a:solidFill>
                 <a:latin typeface="Consolas"/>
               </a:rPr>
-              <a:t>       trx_rows_locked, trx_mysql_thread_id, trx_query</a:t>
+              <a:t>       trx_mysql_thread_id, LEFT(trx_query,80) AS query</a:t>
             </a:r>
           </a:p>
           <a:p>
@@ -10085,6 +10085,22 @@
                 </a:solidFill>
                 <a:latin typeface="Consolas"/>
               </a:rPr>
+              <a:t>-- 结果：trx_id=2583, state=RUNNING, hold_sec=5s, thread=44</a:t>
+            </a:r>
+          </a:p>
+          <a:p>
+            <a:pPr algn="l">
+              <a:lnSpc>
+                <a:spcPct val="105000"/>
+              </a:lnSpc>
+            </a:pPr>
+            <a:r>
+              <a:rPr sz="1100">
+                <a:solidFill>
+                  <a:srgbClr val="D4D4D4"/>
+                </a:solidFill>
+                <a:latin typeface="Consolas"/>
+              </a:rPr>
               <a:t> </a:t>
             </a:r>
           </a:p>
@@ -10101,7 +10117,7 @@
                 </a:solidFill>
                 <a:latin typeface="Consolas"/>
               </a:rPr>
-              <a:t>-- 2) 锁等待关系（谁等谁）</a:t>
+              <a:t>-- 2) 锁等待关系（MySQL 8.0 用 performance_schema）</a:t>
             </a:r>
           </a:p>
           <a:p>
@@ -10117,7 +10133,7 @@
                 </a:solidFill>
                 <a:latin typeface="Consolas"/>
               </a:rPr>
-              <a:t>SELECT r.trx_query AS waiting, b.trx_query AS blocking,</a:t>
+              <a:t>SELECT * FROM performance_schema.data_lock_waits;</a:t>
             </a:r>
           </a:p>
           <a:p>
@@ -10133,55 +10149,7 @@
                 </a:solidFill>
                 <a:latin typeface="Consolas"/>
               </a:rPr>
-              <a:t>       b.trx_mysql_thread_id AS blocking_thread</a:t>
-            </a:r>
-          </a:p>
-          <a:p>
-            <a:pPr algn="l">
-              <a:lnSpc>
-                <a:spcPct val="105000"/>
-              </a:lnSpc>
-            </a:pPr>
-            <a:r>
-              <a:rPr sz="1100">
-                <a:solidFill>
-                  <a:srgbClr val="D4D4D4"/>
-                </a:solidFill>
-                <a:latin typeface="Consolas"/>
-              </a:rPr>
-              <a:t>FROM information_schema.INNODB_LOCK_WAITS w</a:t>
-            </a:r>
-          </a:p>
-          <a:p>
-            <a:pPr algn="l">
-              <a:lnSpc>
-                <a:spcPct val="105000"/>
-              </a:lnSpc>
-            </a:pPr>
-            <a:r>
-              <a:rPr sz="1100">
-                <a:solidFill>
-                  <a:srgbClr val="D4D4D4"/>
-                </a:solidFill>
-                <a:latin typeface="Consolas"/>
-              </a:rPr>
-              <a:t>JOIN INNODB_TRX b ON b.trx_id=w.blocking_trx_id</a:t>
-            </a:r>
-          </a:p>
-          <a:p>
-            <a:pPr algn="l">
-              <a:lnSpc>
-                <a:spcPct val="105000"/>
-              </a:lnSpc>
-            </a:pPr>
-            <a:r>
-              <a:rPr sz="1100">
-                <a:solidFill>
-                  <a:srgbClr val="D4D4D4"/>
-                </a:solidFill>
-                <a:latin typeface="Consolas"/>
-              </a:rPr>
-              <a:t>JOIN INNODB_TRX r ON r.trx_id=w.requesting_trx_id;</a:t>
+              <a:t>-- BLOCKING_TRX_ID / REQUESTING_TRX_ID 显示谁持锁谁等待</a:t>
             </a:r>
           </a:p>
         </p:txBody>
@@ -12646,7 +12614,7 @@
                 </a:solidFill>
                 <a:latin typeface="Consolas"/>
               </a:rPr>
-              <a:t>Seconds_Behind_Master: 120   ← 延迟!</a:t>
+              <a:t>Seconds_Behind_Master: 120   ← 大促期间!</a:t>
             </a:r>
           </a:p>
           <a:p>
@@ -12662,7 +12630,7 @@
                 </a:solidFill>
                 <a:latin typeface="Consolas"/>
               </a:rPr>
-              <a:t>Master_Log_File: mysql-bin.000123</a:t>
+              <a:t>Master_Log_File: binlog.000003</a:t>
             </a:r>
           </a:p>
           <a:p>
@@ -12694,7 +12662,7 @@
                 </a:solidFill>
                 <a:latin typeface="Consolas"/>
               </a:rPr>
-              <a:t>Exec_Master_Log_Pos: 312000000   ← 落后</a:t>
+              <a:t>Exec_Master_Log_Pos: 312000000   ← 落后67万位点</a:t>
             </a:r>
           </a:p>
           <a:p>
@@ -12711,6 +12679,70 @@
                 <a:latin typeface="Consolas"/>
               </a:rPr>
               <a:t>Last_Error: (复制错误信息)</a:t>
+            </a:r>
+          </a:p>
+          <a:p>
+            <a:pPr algn="l">
+              <a:lnSpc>
+                <a:spcPct val="105000"/>
+              </a:lnSpc>
+            </a:pPr>
+            <a:r>
+              <a:rPr sz="1100">
+                <a:solidFill>
+                  <a:srgbClr val="D4D4D4"/>
+                </a:solidFill>
+                <a:latin typeface="Consolas"/>
+              </a:rPr>
+              <a:t> </a:t>
+            </a:r>
+          </a:p>
+          <a:p>
+            <a:pPr algn="l">
+              <a:lnSpc>
+                <a:spcPct val="105000"/>
+              </a:lnSpc>
+            </a:pPr>
+            <a:r>
+              <a:rPr sz="1100">
+                <a:solidFill>
+                  <a:srgbClr val="D4D4D4"/>
+                </a:solidFill>
+                <a:latin typeface="Consolas"/>
+              </a:rPr>
+              <a:t>IO延迟 vs SQL延迟判断:</a:t>
+            </a:r>
+          </a:p>
+          <a:p>
+            <a:pPr algn="l">
+              <a:lnSpc>
+                <a:spcPct val="105000"/>
+              </a:lnSpc>
+            </a:pPr>
+            <a:r>
+              <a:rPr sz="1100">
+                <a:solidFill>
+                  <a:srgbClr val="D4D4D4"/>
+                </a:solidFill>
+                <a:latin typeface="Consolas"/>
+              </a:rPr>
+              <a:t>Read ≠ Exec 位点差 → SQL回放落后</a:t>
+            </a:r>
+          </a:p>
+          <a:p>
+            <a:pPr algn="l">
+              <a:lnSpc>
+                <a:spcPct val="105000"/>
+              </a:lnSpc>
+            </a:pPr>
+            <a:r>
+              <a:rPr sz="1100">
+                <a:solidFill>
+                  <a:srgbClr val="D4D4D4"/>
+                </a:solidFill>
+                <a:latin typeface="Consolas"/>
+              </a:rPr>
+              <a:t>binlog_format=ROW 事务粒度细</a:t>
             </a:r>
           </a:p>
         </p:txBody>
@@ -13991,7 +14023,7 @@
                 </a:solidFill>
                 <a:latin typeface="微软雅黑"/>
               </a:rPr>
-              <a:t>依赖追踪</a:t>
+              <a:t>当前配置</a:t>
             </a:r>
           </a:p>
         </p:txBody>
@@ -14030,7 +14062,7 @@
                 </a:solidFill>
                 <a:latin typeface="微软雅黑"/>
               </a:rPr>
-              <a:t>COMMIT_ORDER</a:t>
+              <a:t>replica_parallel_workers=4</a:t>
             </a:r>
           </a:p>
         </p:txBody>
@@ -14069,7 +14101,7 @@
                 </a:solidFill>
                 <a:latin typeface="微软雅黑"/>
               </a:rPr>
-              <a:t>WRITESET（更细粒度）</a:t>
+              <a:t>replica_parallel_workers=8</a:t>
             </a:r>
           </a:p>
         </p:txBody>
@@ -14191,7 +14223,7 @@
                 </a:solidFill>
                 <a:latin typeface="微软雅黑"/>
               </a:rPr>
-              <a:t>整事务阻塞数秒</a:t>
+              <a:t>整事务阻塞</a:t>
             </a:r>
           </a:p>
         </p:txBody>
@@ -14230,7 +14262,7 @@
                 </a:solidFill>
                 <a:latin typeface="微软雅黑"/>
               </a:rPr>
-              <a:t>分批提交秒级回放</a:t>
+              <a:t>并行回放组提交事务</a:t>
             </a:r>
           </a:p>
         </p:txBody>
@@ -14352,7 +14384,7 @@
                 </a:solidFill>
                 <a:latin typeface="微软雅黑"/>
               </a:rPr>
-              <a:t>120s+</a:t>
+              <a:t>120s+ (大促)</a:t>
             </a:r>
           </a:p>
         </p:txBody>
@@ -26284,7 +26316,7 @@
                 </a:solidFill>
                 <a:latin typeface="Consolas"/>
               </a:rPr>
-              <a:t>-- 故障 SQL：走 idx_user 单列索引 → 回表逐行过滤</a:t>
+              <a:t>-- 故障 SQL：只建 idx_user 单列索引 → 回表逐行过滤</a:t>
             </a:r>
           </a:p>
           <a:p>
@@ -26428,7 +26460,7 @@
                 </a:solidFill>
                 <a:latin typeface="Consolas"/>
               </a:rPr>
-              <a:t>-- 慢日志开启与聚合分析</a:t>
+              <a:t>-- 慢日志开启</a:t>
             </a:r>
           </a:p>
           <a:p>
@@ -26476,7 +26508,39 @@
                 </a:solidFill>
                 <a:latin typeface="Consolas"/>
               </a:rPr>
-              <a:t>mysqldumpslow -s t -t 5 host-slow.log</a:t>
+              <a:t>-- 聚合分析</a:t>
+            </a:r>
+          </a:p>
+          <a:p>
+            <a:pPr algn="l">
+              <a:lnSpc>
+                <a:spcPct val="105000"/>
+              </a:lnSpc>
+            </a:pPr>
+            <a:r>
+              <a:rPr sz="1100">
+                <a:solidFill>
+                  <a:srgbClr val="D4D4D4"/>
+                </a:solidFill>
+                <a:latin typeface="Consolas"/>
+              </a:rPr>
+              <a:t>mysqldumpslow -s t -t 5 /var/lib/mysql/*-slow.log</a:t>
+            </a:r>
+          </a:p>
+          <a:p>
+            <a:pPr algn="l">
+              <a:lnSpc>
+                <a:spcPct val="105000"/>
+              </a:lnSpc>
+            </a:pPr>
+            <a:r>
+              <a:rPr sz="1100">
+                <a:solidFill>
+                  <a:srgbClr val="D4D4D4"/>
+                </a:solidFill>
+                <a:latin typeface="Consolas"/>
+              </a:rPr>
+              <a:t>-- 或 pt-query-digest slow.log | head -50</a:t>
             </a:r>
           </a:p>
         </p:txBody>
@@ -27949,7 +28013,7 @@
                 </a:solidFill>
                 <a:latin typeface="微软雅黑"/>
               </a:rPr>
-              <a:t>8200</a:t>
+              <a:t>20</a:t>
             </a:r>
           </a:p>
         </p:txBody>
@@ -29110,7 +29174,7 @@
                 </a:solidFill>
                 <a:latin typeface="微软雅黑"/>
               </a:rPr>
-              <a:t>ref</a:t>
+              <a:t>range</a:t>
             </a:r>
           </a:p>
         </p:txBody>
@@ -29232,7 +29296,7 @@
                 </a:solidFill>
                 <a:latin typeface="微软雅黑"/>
               </a:rPr>
-              <a:t>8200</a:t>
+              <a:t>20</a:t>
             </a:r>
           </a:p>
         </p:txBody>
@@ -29271,7 +29335,7 @@
                 </a:solidFill>
                 <a:latin typeface="微软雅黑"/>
               </a:rPr>
-              <a:t>20</a:t>
+              <a:t>3</a:t>
             </a:r>
           </a:p>
         </p:txBody>
@@ -29515,7 +29579,7 @@
                 </a:solidFill>
                 <a:latin typeface="微软雅黑"/>
               </a:rPr>
-              <a:t>执行耗时</a:t>
+              <a:t>回表次数</a:t>
             </a:r>
           </a:p>
         </p:txBody>
@@ -29554,7 +29618,7 @@
                 </a:solidFill>
                 <a:latin typeface="微软雅黑"/>
               </a:rPr>
-              <a:t>800ms+</a:t>
+              <a:t>需回表过滤</a:t>
             </a:r>
           </a:p>
         </p:txBody>
@@ -29593,7 +29657,7 @@
                 </a:solidFill>
                 <a:latin typeface="微软雅黑"/>
               </a:rPr>
-              <a:t>&lt;10ms</a:t>
+              <a:t>索引覆盖无需回表</a:t>
             </a:r>
           </a:p>
         </p:txBody>
@@ -29715,7 +29779,7 @@
                 </a:solidFill>
                 <a:latin typeface="微软雅黑"/>
               </a:rPr>
-              <a:t>有</a:t>
+              <a:t>有(额外排序)</a:t>
             </a:r>
           </a:p>
         </p:txBody>
@@ -29754,7 +29818,7 @@
                 </a:solidFill>
                 <a:latin typeface="微软雅黑"/>
               </a:rPr>
-              <a:t>无</a:t>
+              <a:t>无(索引有序)</a:t>
             </a:r>
           </a:p>
         </p:txBody>
@@ -29920,7 +29984,7 @@
                 </a:solidFill>
                 <a:latin typeface="微软雅黑"/>
               </a:rPr>
-              <a:t>扫描行数</a:t>
+              <a:t>扫描行数 rows</a:t>
             </a:r>
           </a:p>
         </p:txBody>
@@ -29959,7 +30023,7 @@
                 </a:solidFill>
                 <a:latin typeface="微软雅黑"/>
               </a:rPr>
-              <a:t>↓ 99.7%</a:t>
+              <a:t>20行 → 3行</a:t>
             </a:r>
           </a:p>
         </p:txBody>
@@ -30023,7 +30087,7 @@
             <a:avLst/>
           </a:prstGeom>
           <a:solidFill>
-            <a:srgbClr val="4CAF50"/>
+            <a:srgbClr val="2E8B8B"/>
           </a:solidFill>
           <a:ln>
             <a:noFill/>
@@ -30086,7 +30150,7 @@
                 </a:solidFill>
                 <a:latin typeface="微软雅黑"/>
               </a:rPr>
-              <a:t>执行耗时</a:t>
+              <a:t>Extra</a:t>
             </a:r>
           </a:p>
         </p:txBody>
@@ -30121,11 +30185,11 @@
             <a:r>
               <a:rPr sz="1500" b="1">
                 <a:solidFill>
-                  <a:srgbClr val="4CAF50"/>
-                </a:solidFill>
-                <a:latin typeface="微软雅黑"/>
-              </a:rPr>
-              <a:t>↓ 98.7%</a:t>
+                  <a:srgbClr val="2E8B8B"/>
+                </a:solidFill>
+                <a:latin typeface="微软雅黑"/>
+              </a:rPr>
+              <a:t>消除 filesort</a:t>
             </a:r>
           </a:p>
         </p:txBody>
@@ -30189,7 +30253,7 @@
             <a:avLst/>
           </a:prstGeom>
           <a:solidFill>
-            <a:srgbClr val="2E8B8B"/>
+            <a:srgbClr val="4A90D9"/>
           </a:solidFill>
           <a:ln>
             <a:noFill/>
@@ -30252,7 +30316,7 @@
                 </a:solidFill>
                 <a:latin typeface="微软雅黑"/>
               </a:rPr>
-              <a:t>filesort</a:t>
+              <a:t>回表</a:t>
             </a:r>
           </a:p>
         </p:txBody>
@@ -30287,11 +30351,11 @@
             <a:r>
               <a:rPr sz="1500" b="1">
                 <a:solidFill>
-                  <a:srgbClr val="2E8B8B"/>
-                </a:solidFill>
-                <a:latin typeface="微软雅黑"/>
-              </a:rPr>
-              <a:t>消除</a:t>
+                  <a:srgbClr val="4A90D9"/>
+                </a:solidFill>
+                <a:latin typeface="微软雅黑"/>
+              </a:rPr>
+              <a:t>无需回表（覆盖索引）</a:t>
             </a:r>
           </a:p>
         </p:txBody>
@@ -30355,7 +30419,7 @@
             <a:avLst/>
           </a:prstGeom>
           <a:solidFill>
-            <a:srgbClr val="4A90D9"/>
+            <a:srgbClr val="E8A33D"/>
           </a:solidFill>
           <a:ln>
             <a:noFill/>
@@ -30418,7 +30482,7 @@
                 </a:solidFill>
                 <a:latin typeface="微软雅黑"/>
               </a:rPr>
-              <a:t>TP99</a:t>
+              <a:t>type</a:t>
             </a:r>
           </a:p>
         </p:txBody>
@@ -30453,11 +30517,11 @@
             <a:r>
               <a:rPr sz="1500" b="1">
                 <a:solidFill>
-                  <a:srgbClr val="4A90D9"/>
-                </a:solidFill>
-                <a:latin typeface="微软雅黑"/>
-              </a:rPr>
-              <a:t>1.2s→45ms</a:t>
+                  <a:srgbClr val="E8A33D"/>
+                </a:solidFill>
+                <a:latin typeface="微软雅黑"/>
+              </a:rPr>
+              <a:t>ref → range</a:t>
             </a:r>
           </a:p>
         </p:txBody>
